--- a/Gruppo_66_JavaScript_ver.pptx
+++ b/Gruppo_66_JavaScript_ver.pptx
@@ -1085,7 +1085,7 @@
           <a:p>
             <a:fld id="{11EAACC7-3B3F-47D1-959A-EF58926E955E}" type="datetimeFigureOut">
               <a:rPr lang="en-US" smtClean="0"/>
-              <a:t>6/30/2023</a:t>
+              <a:t>7/3/2023</a:t>
             </a:fld>
             <a:endParaRPr lang="en-US"/>
           </a:p>
@@ -1283,7 +1283,7 @@
           <a:p>
             <a:fld id="{11EAACC7-3B3F-47D1-959A-EF58926E955E}" type="datetimeFigureOut">
               <a:rPr lang="en-US" smtClean="0"/>
-              <a:t>6/30/2023</a:t>
+              <a:t>7/3/2023</a:t>
             </a:fld>
             <a:endParaRPr lang="en-US"/>
           </a:p>
@@ -1491,7 +1491,7 @@
           <a:p>
             <a:fld id="{11EAACC7-3B3F-47D1-959A-EF58926E955E}" type="datetimeFigureOut">
               <a:rPr lang="en-US" smtClean="0"/>
-              <a:t>6/30/2023</a:t>
+              <a:t>7/3/2023</a:t>
             </a:fld>
             <a:endParaRPr lang="en-US"/>
           </a:p>
@@ -1720,7 +1720,7 @@
           <a:p>
             <a:fld id="{11EAACC7-3B3F-47D1-959A-EF58926E955E}" type="datetimeFigureOut">
               <a:rPr lang="en-US" smtClean="0"/>
-              <a:t>6/30/2023</a:t>
+              <a:t>7/3/2023</a:t>
             </a:fld>
             <a:endParaRPr lang="en-US"/>
           </a:p>
@@ -1995,7 +1995,7 @@
           <a:p>
             <a:fld id="{11EAACC7-3B3F-47D1-959A-EF58926E955E}" type="datetimeFigureOut">
               <a:rPr lang="en-US" smtClean="0"/>
-              <a:t>6/30/2023</a:t>
+              <a:t>7/3/2023</a:t>
             </a:fld>
             <a:endParaRPr lang="en-US"/>
           </a:p>
@@ -2260,7 +2260,7 @@
           <a:p>
             <a:fld id="{11EAACC7-3B3F-47D1-959A-EF58926E955E}" type="datetimeFigureOut">
               <a:rPr lang="en-US" smtClean="0"/>
-              <a:t>6/30/2023</a:t>
+              <a:t>7/3/2023</a:t>
             </a:fld>
             <a:endParaRPr lang="en-US"/>
           </a:p>
@@ -2676,7 +2676,7 @@
           <a:p>
             <a:fld id="{11EAACC7-3B3F-47D1-959A-EF58926E955E}" type="datetimeFigureOut">
               <a:rPr lang="en-US" smtClean="0"/>
-              <a:t>6/30/2023</a:t>
+              <a:t>7/3/2023</a:t>
             </a:fld>
             <a:endParaRPr lang="en-US"/>
           </a:p>
@@ -2817,7 +2817,7 @@
           <a:p>
             <a:fld id="{11EAACC7-3B3F-47D1-959A-EF58926E955E}" type="datetimeFigureOut">
               <a:rPr lang="en-US" smtClean="0"/>
-              <a:t>6/30/2023</a:t>
+              <a:t>7/3/2023</a:t>
             </a:fld>
             <a:endParaRPr lang="en-US"/>
           </a:p>
@@ -2930,7 +2930,7 @@
           <a:p>
             <a:fld id="{11EAACC7-3B3F-47D1-959A-EF58926E955E}" type="datetimeFigureOut">
               <a:rPr lang="en-US" smtClean="0"/>
-              <a:t>6/30/2023</a:t>
+              <a:t>7/3/2023</a:t>
             </a:fld>
             <a:endParaRPr lang="en-US"/>
           </a:p>
@@ -3241,7 +3241,7 @@
           <a:p>
             <a:fld id="{11EAACC7-3B3F-47D1-959A-EF58926E955E}" type="datetimeFigureOut">
               <a:rPr lang="en-US" smtClean="0"/>
-              <a:t>6/30/2023</a:t>
+              <a:t>7/3/2023</a:t>
             </a:fld>
             <a:endParaRPr lang="en-US"/>
           </a:p>
@@ -3532,7 +3532,7 @@
           <a:p>
             <a:fld id="{11EAACC7-3B3F-47D1-959A-EF58926E955E}" type="datetimeFigureOut">
               <a:rPr lang="en-US" smtClean="0"/>
-              <a:t>6/30/2023</a:t>
+              <a:t>7/3/2023</a:t>
             </a:fld>
             <a:endParaRPr lang="en-US"/>
           </a:p>
@@ -4083,7 +4083,7 @@
           <a:p>
             <a:fld id="{11EAACC7-3B3F-47D1-959A-EF58926E955E}" type="datetimeFigureOut">
               <a:rPr lang="en-US" smtClean="0"/>
-              <a:t>6/30/2023</a:t>
+              <a:t>7/3/2023</a:t>
             </a:fld>
             <a:endParaRPr lang="en-US"/>
           </a:p>
@@ -31136,6 +31136,36 @@
           </a:prstGeom>
         </p:spPr>
       </p:pic>
+      <p:pic>
+        <p:nvPicPr>
+          <p:cNvPr id="5" name="图片 4">
+            <a:extLst>
+              <a:ext uri="{FF2B5EF4-FFF2-40B4-BE49-F238E27FC236}">
+                <a16:creationId xmlns:a16="http://schemas.microsoft.com/office/drawing/2014/main" id="{B493C79B-61AB-DA5B-D5DC-5C6D64B083FD}"/>
+              </a:ext>
+            </a:extLst>
+          </p:cNvPr>
+          <p:cNvPicPr>
+            <a:picLocks noChangeAspect="1"/>
+          </p:cNvPicPr>
+          <p:nvPr/>
+        </p:nvPicPr>
+        <p:blipFill>
+          <a:blip r:embed="rId3"/>
+          <a:stretch>
+            <a:fillRect/>
+          </a:stretch>
+        </p:blipFill>
+        <p:spPr>
+          <a:xfrm>
+            <a:off x="10624457" y="4090308"/>
+            <a:ext cx="372836" cy="223702"/>
+          </a:xfrm>
+          <a:prstGeom prst="rect">
+            <a:avLst/>
+          </a:prstGeom>
+        </p:spPr>
+      </p:pic>
     </p:spTree>
     <p:extLst>
       <p:ext uri="{BB962C8B-B14F-4D97-AF65-F5344CB8AC3E}">
